--- a/12차시_SubclassSandbox/강의자료/유니티 프로그래밍 패턴 12차시 - SubclassSandbox.pptx
+++ b/12차시_SubclassSandbox/강의자료/유니티 프로그래밍 패턴 12차시 - SubclassSandbox.pptx
@@ -518,8 +518,7 @@
           <a:p>
             <a:r>
               <a:rPr lang="en-US" dirty="0"/>
-              <a:t>Source: Robert Nystrom, Game Programming Patterns, SubclassSandbox. https://gameprogrammingpatterns.com/subclass-sandbox.html
-Cover slide.</a:t>
+              <a:t>Cover slide.</a:t>
             </a:r>
             <a:endParaRPr lang="en-US" dirty="0"/>
           </a:p>
@@ -607,8 +606,7 @@
           <a:p>
             <a:r>
               <a:rPr lang="en-US" dirty="0"/>
-              <a:t>Source: Robert Nystrom, Game Programming Patterns, SubclassSandbox. https://gameprogrammingpatterns.com/subclass-sandbox.html
-Representative C# code fragment.</a:t>
+              <a:t>Representative C# code fragment.</a:t>
             </a:r>
             <a:endParaRPr lang="en-US" dirty="0"/>
           </a:p>
@@ -696,8 +694,7 @@
           <a:p>
             <a:r>
               <a:rPr lang="en-US" dirty="0"/>
-              <a:t>Source: Robert Nystrom, Game Programming Patterns, SubclassSandbox. https://gameprogrammingpatterns.com/subclass-sandbox.html
-Unity에서 보는 위치: PowerUpBase가 PlaySound, SpawnEffect, DealDamage 같은 보호 메서드를 제공한다. 실습 장면은 Play 버튼만 눌러도 큰 HUD로 현재 상태를 볼 수 있게 만든다. 학생은 HUD 변화를 보며 TODO 구현이 맞는지 확인한다.</a:t>
+              <a:t>Unity에서 보는 위치: PowerUpBase가 PlaySound, SpawnEffect, DealDamage 같은 보호 메서드를 제공한다. 실습 장면은 Play 버튼만 눌러도 큰 HUD로 현재 상태를 볼 수 있게 만든다. 학생은 HUD 변화를 보며 TODO 구현이 맞는지 확인한다.</a:t>
             </a:r>
             <a:endParaRPr lang="en-US" dirty="0"/>
           </a:p>
@@ -785,8 +782,7 @@
           <a:p>
             <a:r>
               <a:rPr lang="en-US" dirty="0"/>
-              <a:t>Source: Robert Nystrom, Game Programming Patterns, SubclassSandbox. https://gameprogrammingpatterns.com/subclass-sandbox.html
-장점: 역할이 나뉘어 기능 추가 위치가 선명해진다. 수정 범위가 줄고, 테스트할 단위가 작아진다. 반복되는 설계 문제를 팀에서 같은 이름으로 토론할 수 있다.</a:t>
+              <a:t>장점: 역할이 나뉘어 기능 추가 위치가 선명해진다. 수정 범위가 줄고, 테스트할 단위가 작아진다. 반복되는 설계 문제를 팀에서 같은 이름으로 토론할 수 있다.</a:t>
             </a:r>
             <a:endParaRPr lang="en-US" dirty="0"/>
           </a:p>
@@ -874,8 +870,7 @@
           <a:p>
             <a:r>
               <a:rPr lang="en-US" dirty="0"/>
-              <a:t>Source: Robert Nystrom, Game Programming Patterns, SubclassSandbox. https://gameprogrammingpatterns.com/subclass-sandbox.html
-주의점: 상위 클래스가 너무 커지면 God class가 될 수 있다. 패턴은 자동 정답이 아니라 비용과 이득을 비교해 선택하는 도구다. 작은 예제에 과하게 적용하면 오히려 코드가 길어진다.</a:t>
+              <a:t>주의점: 상위 클래스가 너무 커지면 God class가 될 수 있다. 패턴은 자동 정답이 아니라 비용과 이득을 비교해 선택하는 도구다. 작은 예제에 과하게 적용하면 오히려 코드가 길어진다.</a:t>
             </a:r>
             <a:endParaRPr lang="en-US" dirty="0"/>
           </a:p>
@@ -963,8 +958,7 @@
           <a:p>
             <a:r>
               <a:rPr lang="en-US" dirty="0"/>
-              <a:t>Source: Robert Nystrom, Game Programming Patterns, SubclassSandbox. https://gameprogrammingpatterns.com/subclass-sandbox.html
-Unity 실습 목표: PowerUp 하위 클래스가 보호 메서드만 사용해 효과를 만든다. 학생용 스크립트에는 핵심 구현이 TODO로 비워져 있다. 정답 코드는 프로젝트 루트의 `실습자료 정답` 폴더에 따로 둔다.</a:t>
+              <a:t>Unity 실습 목표: PowerUp 하위 클래스가 보호 메서드만 사용해 효과를 만든다. 학생용 스크립트에는 핵심 구현이 TODO로 비워져 있다. 정답 코드는 프로젝트 루트의 `실습자료 정답` 폴더에 따로 둔다.</a:t>
             </a:r>
             <a:endParaRPr lang="en-US" dirty="0"/>
           </a:p>
@@ -1052,8 +1046,7 @@
           <a:p>
             <a:r>
               <a:rPr lang="en-US" dirty="0"/>
-              <a:t>Source: Robert Nystrom, Game Programming Patterns, SubclassSandbox. https://gameprogrammingpatterns.com/subclass-sandbox.html
-학생 TODO 목록: 기본 Activate 정의 protected helper 사용 하위 클래스 구현 중복 제거 HUD 로그</a:t>
+              <a:t>학생 TODO 목록: 기본 Activate 정의 protected helper 사용 하위 클래스 구현 중복 제거 HUD 로그</a:t>
             </a:r>
             <a:endParaRPr lang="en-US" dirty="0"/>
           </a:p>
@@ -1141,8 +1134,7 @@
           <a:p>
             <a:r>
               <a:rPr lang="en-US" dirty="0"/>
-              <a:t>Source: Robert Nystrom, Game Programming Patterns, SubclassSandbox. https://gameprogrammingpatterns.com/subclass-sandbox.html
-통과 기준: 프로젝트가 컴파일되고 해당 차시 씬을 열 수 있다. Play 버튼을 누르면 큰 화면 UI에서 결과가 확인된다. TODO를 채운 뒤 패턴의 핵심 동작이 눈으로 확인된다.</a:t>
+              <a:t>통과 기준: 프로젝트가 컴파일되고 해당 차시 씬을 열 수 있다. Play 버튼을 누르면 큰 화면 UI에서 결과가 확인된다. TODO를 채운 뒤 패턴의 핵심 동작이 눈으로 확인된다.</a:t>
             </a:r>
             <a:endParaRPr lang="en-US" dirty="0"/>
           </a:p>
@@ -1230,8 +1222,7 @@
           <a:p>
             <a:r>
               <a:rPr lang="en-US" dirty="0"/>
-              <a:t>Source: Robert Nystrom, Game Programming Patterns, SubclassSandbox. https://gameprogrammingpatterns.com/subclass-sandbox.html
-정리: 서브클래스 샌드박스 패턴은 하위 클래스가 안전한 도구 메서드 안에서만 행동을 조립하게 만든다. 패턴 이름보다 중요한 것은 책임 분리와 데이터 흐름을 설명할 수 있는 것이다. 다음 차시에서는 다른 설계 압력이 어떤 패턴으로 바뀌는지 비교한다.</a:t>
+              <a:t>정리: 서브클래스 샌드박스 패턴은 하위 클래스가 안전한 도구 메서드 안에서만 행동을 조립하게 만든다. 패턴 이름보다 중요한 것은 책임 분리와 데이터 흐름을 설명할 수 있는 것이다. 다음 차시에서는 다른 설계 압력이 어떤 패턴으로 바뀌는지 비교한다.</a:t>
             </a:r>
             <a:endParaRPr lang="en-US" dirty="0"/>
           </a:p>
@@ -1319,8 +1310,7 @@
           <a:p>
             <a:r>
               <a:rPr lang="en-US" dirty="0"/>
-              <a:t>Source: Robert Nystrom, Game Programming Patterns, SubclassSandbox. https://gameprogrammingpatterns.com/subclass-sandbox.html
-오늘의 학습 목표: 패턴이 해결하려는 결합도나 성능 문제를 설명한다. SubclassSandbox 패턴의 핵심 구조를 C# 코드로 읽는다. Unity 장면에서 패턴이 어떻게 보이는지 확인한다. 학생용 TODO 코드를 완성해 동작 기준을 통과한다.</a:t>
+              <a:t>오늘의 학습 목표: 패턴이 해결하려는 결합도나 성능 문제를 설명한다. SubclassSandbox 패턴의 핵심 구조를 C# 코드로 읽는다. Unity 장면에서 패턴이 어떻게 보이는지 확인한다. 학생용 TODO 코드를 완성해 동작 기준을 통과한다.</a:t>
             </a:r>
             <a:endParaRPr lang="en-US" dirty="0"/>
           </a:p>
@@ -1408,8 +1398,7 @@
           <a:p>
             <a:r>
               <a:rPr lang="en-US" dirty="0"/>
-              <a:t>Source: Robert Nystrom, Game Programming Patterns, SubclassSandbox. https://gameprogrammingpatterns.com/subclass-sandbox.html
-문제 상황: 하위 클래스가 엔진 내부 전체에 접근하면 강력하지만 위험하고 중복도 늘어난다. 처음에는 간단한 조건문이나 직접 참조로 해결할 수 있지만, 기능이 늘어나면 수정 범위가 커진다. 패턴은 이런 반복되는 설계 압력을 이름 붙이고 안전한 구조로 바꾼다.</a:t>
+              <a:t>문제 상황: 하위 클래스가 엔진 내부 전체에 접근하면 강력하지만 위험하고 중복도 늘어난다. 처음에는 간단한 조건문이나 직접 참조로 해결할 수 있지만, 기능이 늘어나면 수정 범위가 커진다. 패턴은 이런 반복되는 설계 압력을 이름 붙이고 안전한 구조로 바꾼다.</a:t>
             </a:r>
             <a:endParaRPr lang="en-US" dirty="0"/>
           </a:p>
@@ -1497,8 +1486,7 @@
           <a:p>
             <a:r>
               <a:rPr lang="en-US" dirty="0"/>
-              <a:t>Source: Robert Nystrom, Game Programming Patterns, SubclassSandbox. https://gameprogrammingpatterns.com/subclass-sandbox.html
-원문 흐름 1: 능력 구현 문제: 이 구간의 문제와 해결 방향을 수업 예제로 바꿔 본다. 샌드박스 메서드: 이 구간의 문제와 해결 방향을 수업 예제로 바꿔 본다. 상위 클래스가 제공하는 도구: 이 구간의 문제와 해결 방향을 수업 예제로 바꿔 본다.</a:t>
+              <a:t>예제 흐름 1: 능력 구현 문제: 이 구간의 문제와 해결 방향을 수업 예제로 바꿔 본다. 샌드박스 메서드: 이 구간의 문제와 해결 방향을 수업 예제로 바꿔 본다. 상위 클래스가 제공하는 도구: 이 구간의 문제와 해결 방향을 수업 예제로 바꿔 본다.</a:t>
             </a:r>
             <a:endParaRPr lang="en-US" dirty="0"/>
           </a:p>
@@ -1586,8 +1574,7 @@
           <a:p>
             <a:r>
               <a:rPr lang="en-US" dirty="0"/>
-              <a:t>Source: Robert Nystrom, Game Programming Patterns, SubclassSandbox. https://gameprogrammingpatterns.com/subclass-sandbox.html
-원문 흐름 2: 결합도: Unity/C# 관점에서 장점과 주의점을 연결한다. 확장 균형: Unity/C# 관점에서 장점과 주의점을 연결한다.</a:t>
+              <a:t>예제 흐름 2: 결합도: Unity/C# 관점에서 장점과 주의점을 연결한다. 확장 균형: Unity/C# 관점에서 장점과 주의점을 연결한다.</a:t>
             </a:r>
             <a:endParaRPr lang="en-US" dirty="0"/>
           </a:p>
@@ -1675,8 +1662,7 @@
           <a:p>
             <a:r>
               <a:rPr lang="en-US" dirty="0"/>
-              <a:t>Source: Robert Nystrom, Game Programming Patterns, SubclassSandbox. https://gameprogrammingpatterns.com/subclass-sandbox.html
-한 문장 정의: Superclass가 보호된 helper 메서드를 제공하고, subclass는 그 도구로 행동을 구현한다. 중요한 것은 코드 모양을 외우는 것이 아니라, 어떤 의존성을 어디로 옮기는지 이해하는 것이다.</a:t>
+              <a:t>한 문장 정의: Superclass가 보호된 helper 메서드를 제공하고, subclass는 그 도구로 행동을 구현한다. 중요한 것은 코드 모양을 외우는 것이 아니라, 어떤 의존성을 어디로 옮기는지 이해하는 것이다.</a:t>
             </a:r>
             <a:endParaRPr lang="en-US" dirty="0"/>
           </a:p>
@@ -1764,8 +1750,7 @@
           <a:p>
             <a:r>
               <a:rPr lang="en-US" dirty="0"/>
-              <a:t>Source: Robert Nystrom, Game Programming Patterns, SubclassSandbox. https://gameprogrammingpatterns.com/subclass-sandbox.html
-핵심 구성 요소: Base Class: SubclassSandbox 패턴을 설명할 때 반복해서 등장하는 역할이다. Protected Helper: SubclassSandbox 패턴을 설명할 때 반복해서 등장하는 역할이다. Sandbox: SubclassSandbox 패턴을 설명할 때 반복해서 등장하는 역할이다. Subclass: SubclassSandbox 패턴을 설명할 때 반복해서 등장하는 역할이다. Controlled Access: SubclassSandbox 패턴을 설명할 때 반복해서 등장하는 역할이다.</a:t>
+              <a:t>핵심 구성 요소: Base Class: SubclassSandbox 패턴을 설명할 때 반복해서 등장하는 역할이다. Protected Helper: SubclassSandbox 패턴을 설명할 때 반복해서 등장하는 역할이다. Sandbox: SubclassSandbox 패턴을 설명할 때 반복해서 등장하는 역할이다. Subclass: SubclassSandbox 패턴을 설명할 때 반복해서 등장하는 역할이다. Controlled Access: SubclassSandbox 패턴을 설명할 때 반복해서 등장하는 역할이다.</a:t>
             </a:r>
             <a:endParaRPr lang="en-US" dirty="0"/>
           </a:p>
@@ -1853,8 +1838,7 @@
           <a:p>
             <a:r>
               <a:rPr lang="en-US" dirty="0"/>
-              <a:t>Source: Robert Nystrom, Game Programming Patterns, SubclassSandbox. https://gameprogrammingpatterns.com/subclass-sandbox.html
-나쁜 출발점: 모든 시스템이 서로를 직접 알고 호출한다. 작은 기능을 추가할 때 관련 없는 클래스까지 수정해야 한다. 테스트와 재사용이 어려워지고, 실행 순서 버그가 숨어든다.</a:t>
+              <a:t>나쁜 출발점: 모든 시스템이 서로를 직접 알고 호출한다. 작은 기능을 추가할 때 관련 없는 클래스까지 수정해야 한다. 테스트와 재사용이 어려워지고, 실행 순서 버그가 숨어든다.</a:t>
             </a:r>
             <a:endParaRPr lang="en-US" dirty="0"/>
           </a:p>
@@ -1942,8 +1926,7 @@
           <a:p>
             <a:r>
               <a:rPr lang="en-US" dirty="0"/>
-              <a:t>Source: Robert Nystrom, Game Programming Patterns, SubclassSandbox. https://gameprogrammingpatterns.com/subclass-sandbox.html
-패턴을 적용한 구조: 하위 클래스가 안전한 도구 메서드 안에서만 행동을 조립하게 만든다. 객체의 책임을 분리하고, 바뀌는 부분을 명확한 경계 뒤로 숨긴다. 그 결과 기능 추가 위치가 예측 가능해진다.</a:t>
+              <a:t>패턴을 적용한 구조: 하위 클래스가 안전한 도구 메서드 안에서만 행동을 조립하게 만든다. 객체의 책임을 분리하고, 바뀌는 부분을 명확한 경계 뒤로 숨긴다. 그 결과 기능 추가 위치가 예측 가능해진다.</a:t>
             </a:r>
             <a:endParaRPr lang="en-US" dirty="0"/>
           </a:p>
@@ -2854,7 +2837,7 @@
                 <a:ea typeface="Malgun Gothic" pitchFamily="34" charset="-122"/>
                 <a:cs typeface="Malgun Gothic" pitchFamily="34" charset="-120"/>
               </a:rPr>
-              <a:t>Game Programming Patterns · Unity/C#</a:t>
+              <a:t>Unity/C# 설계 패턴</a:t>
             </a:r>
             <a:endParaRPr lang="en-US" sz="1050" dirty="0"/>
           </a:p>
@@ -3055,7 +3038,7 @@
                 <a:ea typeface="Malgun Gothic" pitchFamily="34" charset="-122"/>
                 <a:cs typeface="Malgun Gothic" pitchFamily="34" charset="-120"/>
               </a:rPr>
-              <a:t>Game Programming Patterns - SubclassSandbox | Unity/C#</a:t>
+              <a:t>SubclassSandbox | Unity/C#</a:t>
             </a:r>
             <a:endParaRPr lang="en-US" sz="700" dirty="0"/>
           </a:p>
@@ -3198,7 +3181,7 @@
                 <a:ea typeface="Consolas" pitchFamily="34" charset="-122"/>
                 <a:cs typeface="Consolas" pitchFamily="34" charset="-120"/>
               </a:rPr>
-              <a:t>    log.Add($"Effect: {id}");</a:t>
+              <a:t>log.Add($"Effect: {id}");</a:t>
             </a:r>
             <a:endParaRPr lang="en-US" sz="1300" dirty="0"/>
           </a:p>
@@ -3416,7 +3399,7 @@
                 <a:ea typeface="Malgun Gothic" pitchFamily="34" charset="-122"/>
                 <a:cs typeface="Malgun Gothic" pitchFamily="34" charset="-120"/>
               </a:rPr>
-              <a:t>Game Programming Patterns - SubclassSandbox | Unity/C#</a:t>
+              <a:t>SubclassSandbox | Unity/C#</a:t>
             </a:r>
             <a:endParaRPr lang="en-US" sz="700" dirty="0"/>
           </a:p>
@@ -3815,7 +3798,7 @@
                 <a:ea typeface="Malgun Gothic" pitchFamily="34" charset="-122"/>
                 <a:cs typeface="Malgun Gothic" pitchFamily="34" charset="-120"/>
               </a:rPr>
-              <a:t>Game Programming Patterns - SubclassSandbox | Unity/C#</a:t>
+              <a:t>SubclassSandbox | Unity/C#</a:t>
             </a:r>
             <a:endParaRPr lang="en-US" sz="700" dirty="0"/>
           </a:p>
@@ -4214,7 +4197,7 @@
                 <a:ea typeface="Malgun Gothic" pitchFamily="34" charset="-122"/>
                 <a:cs typeface="Malgun Gothic" pitchFamily="34" charset="-120"/>
               </a:rPr>
-              <a:t>Game Programming Patterns - SubclassSandbox | Unity/C#</a:t>
+              <a:t>SubclassSandbox | Unity/C#</a:t>
             </a:r>
             <a:endParaRPr lang="en-US" sz="700" dirty="0"/>
           </a:p>
@@ -4613,7 +4596,7 @@
                 <a:ea typeface="Malgun Gothic" pitchFamily="34" charset="-122"/>
                 <a:cs typeface="Malgun Gothic" pitchFamily="34" charset="-120"/>
               </a:rPr>
-              <a:t>Game Programming Patterns - SubclassSandbox | Unity/C#</a:t>
+              <a:t>SubclassSandbox | Unity/C#</a:t>
             </a:r>
             <a:endParaRPr lang="en-US" sz="700" dirty="0"/>
           </a:p>
@@ -5012,7 +4995,7 @@
                 <a:ea typeface="Malgun Gothic" pitchFamily="34" charset="-122"/>
                 <a:cs typeface="Malgun Gothic" pitchFamily="34" charset="-120"/>
               </a:rPr>
-              <a:t>Game Programming Patterns - SubclassSandbox | Unity/C#</a:t>
+              <a:t>SubclassSandbox | Unity/C#</a:t>
             </a:r>
             <a:endParaRPr lang="en-US" sz="700" dirty="0"/>
           </a:p>
@@ -5543,7 +5526,7 @@
                 <a:ea typeface="Malgun Gothic" pitchFamily="34" charset="-122"/>
                 <a:cs typeface="Malgun Gothic" pitchFamily="34" charset="-120"/>
               </a:rPr>
-              <a:t>Game Programming Patterns - SubclassSandbox | Unity/C#</a:t>
+              <a:t>SubclassSandbox | Unity/C#</a:t>
             </a:r>
             <a:endParaRPr lang="en-US" sz="700" dirty="0"/>
           </a:p>
@@ -5942,7 +5925,7 @@
                 <a:ea typeface="Malgun Gothic" pitchFamily="34" charset="-122"/>
                 <a:cs typeface="Malgun Gothic" pitchFamily="34" charset="-120"/>
               </a:rPr>
-              <a:t>Game Programming Patterns - SubclassSandbox | Unity/C#</a:t>
+              <a:t>SubclassSandbox | Unity/C#</a:t>
             </a:r>
             <a:endParaRPr lang="en-US" sz="700" dirty="0"/>
           </a:p>
@@ -6341,7 +6324,7 @@
                 <a:ea typeface="Malgun Gothic" pitchFamily="34" charset="-122"/>
                 <a:cs typeface="Malgun Gothic" pitchFamily="34" charset="-120"/>
               </a:rPr>
-              <a:t>Game Programming Patterns - SubclassSandbox | Unity/C#</a:t>
+              <a:t>SubclassSandbox | Unity/C#</a:t>
             </a:r>
             <a:endParaRPr lang="en-US" sz="700" dirty="0"/>
           </a:p>
@@ -6806,7 +6789,7 @@
                 <a:ea typeface="Malgun Gothic" pitchFamily="34" charset="-122"/>
                 <a:cs typeface="Malgun Gothic" pitchFamily="34" charset="-120"/>
               </a:rPr>
-              <a:t>Game Programming Patterns - SubclassSandbox | Unity/C#</a:t>
+              <a:t>SubclassSandbox | Unity/C#</a:t>
             </a:r>
             <a:endParaRPr lang="en-US" sz="700" dirty="0"/>
           </a:p>
@@ -7127,7 +7110,7 @@
                 <a:ea typeface="Malgun Gothic" pitchFamily="34" charset="-122"/>
                 <a:cs typeface="Malgun Gothic" pitchFamily="34" charset="-120"/>
               </a:rPr>
-              <a:t>원문 흐름 1</a:t>
+              <a:t>예제 흐름 1</a:t>
             </a:r>
             <a:endParaRPr lang="en-US" sz="2400" dirty="0"/>
           </a:p>
@@ -7205,7 +7188,7 @@
                 <a:ea typeface="Malgun Gothic" pitchFamily="34" charset="-122"/>
                 <a:cs typeface="Malgun Gothic" pitchFamily="34" charset="-120"/>
               </a:rPr>
-              <a:t>Game Programming Patterns - SubclassSandbox | Unity/C#</a:t>
+              <a:t>SubclassSandbox | Unity/C#</a:t>
             </a:r>
             <a:endParaRPr lang="en-US" sz="700" dirty="0"/>
           </a:p>
@@ -7526,7 +7509,7 @@
                 <a:ea typeface="Malgun Gothic" pitchFamily="34" charset="-122"/>
                 <a:cs typeface="Malgun Gothic" pitchFamily="34" charset="-120"/>
               </a:rPr>
-              <a:t>원문 흐름 2</a:t>
+              <a:t>예제 흐름 2</a:t>
             </a:r>
             <a:endParaRPr lang="en-US" sz="2400" dirty="0"/>
           </a:p>
@@ -7604,7 +7587,7 @@
                 <a:ea typeface="Malgun Gothic" pitchFamily="34" charset="-122"/>
                 <a:cs typeface="Malgun Gothic" pitchFamily="34" charset="-120"/>
               </a:rPr>
-              <a:t>Game Programming Patterns - SubclassSandbox | Unity/C#</a:t>
+              <a:t>SubclassSandbox | Unity/C#</a:t>
             </a:r>
             <a:endParaRPr lang="en-US" sz="700" dirty="0"/>
           </a:p>
@@ -7937,7 +7920,7 @@
                 <a:ea typeface="Malgun Gothic" pitchFamily="34" charset="-122"/>
                 <a:cs typeface="Malgun Gothic" pitchFamily="34" charset="-120"/>
               </a:rPr>
-              <a:t>Game Programming Patterns - SubclassSandbox | Unity/C#</a:t>
+              <a:t>SubclassSandbox | Unity/C#</a:t>
             </a:r>
             <a:endParaRPr lang="en-US" sz="700" dirty="0"/>
           </a:p>
@@ -8270,7 +8253,7 @@
                 <a:ea typeface="Malgun Gothic" pitchFamily="34" charset="-122"/>
                 <a:cs typeface="Malgun Gothic" pitchFamily="34" charset="-120"/>
               </a:rPr>
-              <a:t>Game Programming Patterns - SubclassSandbox | Unity/C#</a:t>
+              <a:t>SubclassSandbox | Unity/C#</a:t>
             </a:r>
             <a:endParaRPr lang="en-US" sz="700" dirty="0"/>
           </a:p>
@@ -8801,7 +8784,7 @@
                 <a:ea typeface="Malgun Gothic" pitchFamily="34" charset="-122"/>
                 <a:cs typeface="Malgun Gothic" pitchFamily="34" charset="-120"/>
               </a:rPr>
-              <a:t>Game Programming Patterns - SubclassSandbox | Unity/C#</a:t>
+              <a:t>SubclassSandbox | Unity/C#</a:t>
             </a:r>
             <a:endParaRPr lang="en-US" sz="700" dirty="0"/>
           </a:p>
@@ -9200,7 +9183,7 @@
                 <a:ea typeface="Malgun Gothic" pitchFamily="34" charset="-122"/>
                 <a:cs typeface="Malgun Gothic" pitchFamily="34" charset="-120"/>
               </a:rPr>
-              <a:t>Game Programming Patterns - SubclassSandbox | Unity/C#</a:t>
+              <a:t>SubclassSandbox | Unity/C#</a:t>
             </a:r>
             <a:endParaRPr lang="en-US" sz="700" dirty="0"/>
           </a:p>
